--- a/docs/カラーパレッド.pptx
+++ b/docs/カラーパレッド.pptx
@@ -108,6 +108,11 @@
       </a:defRPr>
     </a:lvl9pPr>
   </p:defaultTextStyle>
+  <p:extLst>
+    <p:ext uri="{EFAFB233-063F-42B5-8137-9DF3F51BA10A}">
+      <p15:sldGuideLst xmlns:p15="http://schemas.microsoft.com/office/powerpoint/2012/main"/>
+    </p:ext>
+  </p:extLst>
 </p:presentation>
 </file>
 
@@ -3801,6 +3806,48 @@
           </a:p>
         </p:txBody>
       </p:sp>
+      <p:sp>
+        <p:nvSpPr>
+          <p:cNvPr id="4" name="テキスト ボックス 3">
+            <a:extLst>
+              <a:ext uri="{FF2B5EF4-FFF2-40B4-BE49-F238E27FC236}">
+                <a16:creationId xmlns:a16="http://schemas.microsoft.com/office/drawing/2014/main" id="{95E99F33-6C44-B91E-A469-C3BC9495DE47}"/>
+              </a:ext>
+            </a:extLst>
+          </p:cNvPr>
+          <p:cNvSpPr txBox="1"/>
+          <p:nvPr/>
+        </p:nvSpPr>
+        <p:spPr>
+          <a:xfrm>
+            <a:off x="6544172" y="6488668"/>
+            <a:ext cx="5647828" cy="369332"/>
+          </a:xfrm>
+          <a:prstGeom prst="rect">
+            <a:avLst/>
+          </a:prstGeom>
+          <a:noFill/>
+        </p:spPr>
+        <p:txBody>
+          <a:bodyPr wrap="none" rtlCol="0">
+            <a:spAutoFit/>
+          </a:bodyPr>
+          <a:lstStyle/>
+          <a:p>
+            <a:r>
+              <a:rPr kumimoji="1" lang="en-US" altLang="ja-JP" dirty="0">
+                <a:latin typeface="メイリオ" panose="020B0604030504040204" pitchFamily="50" charset="-128"/>
+                <a:ea typeface="メイリオ" panose="020B0604030504040204" pitchFamily="50" charset="-128"/>
+              </a:rPr>
+              <a:t>https://github.com/tenten3735/color-palette.git</a:t>
+            </a:r>
+            <a:endParaRPr kumimoji="1" lang="ja-JP" altLang="en-US" dirty="0">
+              <a:latin typeface="メイリオ" panose="020B0604030504040204" pitchFamily="50" charset="-128"/>
+              <a:ea typeface="メイリオ" panose="020B0604030504040204" pitchFamily="50" charset="-128"/>
+            </a:endParaRPr>
+          </a:p>
+        </p:txBody>
+      </p:sp>
     </p:spTree>
     <p:extLst>
       <p:ext uri="{BB962C8B-B14F-4D97-AF65-F5344CB8AC3E}">
